--- a/Funomatic/doc/Presentaciónapp.pptx
+++ b/Funomatic/doc/Presentaciónapp.pptx
@@ -13,6 +13,7 @@
     <p:sldId id="261" r:id="rId7"/>
     <p:sldId id="262" r:id="rId8"/>
     <p:sldId id="263" r:id="rId9"/>
+    <p:sldId id="264" r:id="rId10"/>
   </p:sldIdLst>
   <p:sldSz cx="12192000" cy="6858000"/>
   <p:notesSz cx="6858000" cy="9144000"/>
@@ -111,6 +112,11 @@
       </a:defRPr>
     </a:lvl9pPr>
   </p:defaultTextStyle>
+  <p:extLst>
+    <p:ext uri="{EFAFB233-063F-42B5-8137-9DF3F51BA10A}">
+      <p15:sldGuideLst xmlns:p15="http://schemas.microsoft.com/office/powerpoint/2012/main"/>
+    </p:ext>
+  </p:extLst>
 </p:presentation>
 </file>
 
@@ -3316,6 +3322,95 @@
   <p:cSld>
     <p:bg>
       <p:bgPr>
+        <a:solidFill>
+          <a:srgbClr val="7030A0"/>
+        </a:solidFill>
+        <a:effectLst/>
+      </p:bgPr>
+    </p:bg>
+    <p:spTree>
+      <p:nvGrpSpPr>
+        <p:cNvPr id="1" name=""/>
+        <p:cNvGrpSpPr/>
+        <p:nvPr/>
+      </p:nvGrpSpPr>
+      <p:grpSpPr>
+        <a:xfrm>
+          <a:off x="0" y="0"/>
+          <a:ext cx="0" cy="0"/>
+          <a:chOff x="0" y="0"/>
+          <a:chExt cx="0" cy="0"/>
+        </a:xfrm>
+      </p:grpSpPr>
+      <p:pic>
+        <p:nvPicPr>
+          <p:cNvPr id="11" name="Imagen 10">
+            <a:extLst>
+              <a:ext uri="{FF2B5EF4-FFF2-40B4-BE49-F238E27FC236}">
+                <a16:creationId xmlns:a16="http://schemas.microsoft.com/office/drawing/2014/main" id="{90987D80-0F2A-8339-15E8-74DD659467EC}"/>
+              </a:ext>
+            </a:extLst>
+          </p:cNvPr>
+          <p:cNvPicPr>
+            <a:picLocks noChangeAspect="1"/>
+          </p:cNvPicPr>
+          <p:nvPr/>
+        </p:nvPicPr>
+        <p:blipFill>
+          <a:blip r:embed="rId2">
+            <a:extLst>
+              <a:ext uri="{28A0092B-C50C-407E-A947-70E740481C1C}">
+                <a14:useLocalDpi xmlns:a14="http://schemas.microsoft.com/office/drawing/2010/main" val="0"/>
+              </a:ext>
+            </a:extLst>
+          </a:blip>
+          <a:stretch>
+            <a:fillRect/>
+          </a:stretch>
+        </p:blipFill>
+        <p:spPr>
+          <a:xfrm>
+            <a:off x="2057400" y="341299"/>
+            <a:ext cx="8077200" cy="6024578"/>
+          </a:xfrm>
+          <a:prstGeom prst="rect">
+            <a:avLst/>
+          </a:prstGeom>
+          <a:solidFill>
+            <a:srgbClr val="7030A0"/>
+          </a:solidFill>
+        </p:spPr>
+      </p:pic>
+    </p:spTree>
+    <p:extLst>
+      <p:ext uri="{BB962C8B-B14F-4D97-AF65-F5344CB8AC3E}">
+        <p14:creationId xmlns:p14="http://schemas.microsoft.com/office/powerpoint/2010/main" val="3358129538"/>
+      </p:ext>
+    </p:extLst>
+  </p:cSld>
+  <p:clrMapOvr>
+    <a:masterClrMapping/>
+  </p:clrMapOvr>
+  <mc:AlternateContent xmlns:mc="http://schemas.openxmlformats.org/markup-compatibility/2006">
+    <mc:Choice xmlns:p159="http://schemas.microsoft.com/office/powerpoint/2015/09/main" Requires="p159">
+      <p:transition xmlns:p14="http://schemas.microsoft.com/office/powerpoint/2010/main" spd="slow" p14:dur="2000">
+        <p159:morph option="byObject"/>
+      </p:transition>
+    </mc:Choice>
+    <mc:Fallback>
+      <p:transition spd="slow">
+        <p:fade/>
+      </p:transition>
+    </mc:Fallback>
+  </mc:AlternateContent>
+</p:sld>
+</file>
+
+<file path=ppt/slides/slide2.xml><?xml version="1.0" encoding="utf-8"?>
+<p:sld xmlns:a="http://schemas.openxmlformats.org/drawingml/2006/main" xmlns:r="http://schemas.openxmlformats.org/officeDocument/2006/relationships" xmlns:p="http://schemas.openxmlformats.org/presentationml/2006/main">
+  <p:cSld>
+    <p:bg>
+      <p:bgPr>
         <a:blipFill dpi="0" rotWithShape="1">
           <a:blip r:embed="rId2">
             <a:lum/>
@@ -3342,162 +3437,6 @@
           <a:chExt cx="0" cy="0"/>
         </a:xfrm>
       </p:grpSpPr>
-      <p:sp>
-        <p:nvSpPr>
-          <p:cNvPr id="2" name="Título 1">
-            <a:extLst>
-              <a:ext uri="{FF2B5EF4-FFF2-40B4-BE49-F238E27FC236}">
-                <a16:creationId xmlns:a16="http://schemas.microsoft.com/office/drawing/2014/main" id="{08C25ED8-4674-87F2-2006-6254CC3A3DB6}"/>
-              </a:ext>
-            </a:extLst>
-          </p:cNvPr>
-          <p:cNvSpPr>
-            <a:spLocks noGrp="1"/>
-          </p:cNvSpPr>
-          <p:nvPr>
-            <p:ph type="ctrTitle"/>
-          </p:nvPr>
-        </p:nvSpPr>
-        <p:spPr>
-          <a:xfrm>
-            <a:off x="1767840" y="1315721"/>
-            <a:ext cx="9144000" cy="2286317"/>
-          </a:xfrm>
-          <a:solidFill>
-            <a:srgbClr val="7030A0"/>
-          </a:solidFill>
-          <a:effectLst>
-            <a:softEdge rad="12700"/>
-          </a:effectLst>
-        </p:spPr>
-        <p:txBody>
-          <a:bodyPr>
-            <a:normAutofit fontScale="90000"/>
-          </a:bodyPr>
-          <a:lstStyle/>
-          <a:p>
-            <a:br>
-              <a:rPr lang="es-ES" dirty="0">
-                <a:solidFill>
-                  <a:schemeClr val="bg1"/>
-                </a:solidFill>
-                <a:latin typeface="Bodoni MT Black" panose="02070A03080606020203" pitchFamily="18" charset="0"/>
-              </a:rPr>
-            </a:br>
-            <a:br>
-              <a:rPr lang="es-ES" dirty="0">
-                <a:solidFill>
-                  <a:schemeClr val="bg1"/>
-                </a:solidFill>
-                <a:latin typeface="Bodoni MT Black" panose="02070A03080606020203" pitchFamily="18" charset="0"/>
-              </a:rPr>
-            </a:br>
-            <a:br>
-              <a:rPr lang="es-ES" dirty="0">
-                <a:solidFill>
-                  <a:schemeClr val="bg1"/>
-                </a:solidFill>
-                <a:latin typeface="Bodoni MT Black" panose="02070A03080606020203" pitchFamily="18" charset="0"/>
-              </a:rPr>
-            </a:br>
-            <a:r>
-              <a:rPr lang="es-ES" dirty="0">
-                <a:solidFill>
-                  <a:schemeClr val="bg1"/>
-                </a:solidFill>
-                <a:latin typeface="Bodoni MT Black" panose="02070A03080606020203" pitchFamily="18" charset="0"/>
-              </a:rPr>
-              <a:t>FUN – O – MATIC</a:t>
-            </a:r>
-            <a:br>
-              <a:rPr lang="es-ES" dirty="0">
-                <a:solidFill>
-                  <a:schemeClr val="bg1"/>
-                </a:solidFill>
-                <a:latin typeface="Bodoni MT Black" panose="02070A03080606020203" pitchFamily="18" charset="0"/>
-              </a:rPr>
-            </a:br>
-            <a:endParaRPr lang="es-ES" dirty="0">
-              <a:solidFill>
-                <a:schemeClr val="bg1"/>
-              </a:solidFill>
-              <a:latin typeface="Bodoni MT Black" panose="02070A03080606020203" pitchFamily="18" charset="0"/>
-            </a:endParaRPr>
-          </a:p>
-        </p:txBody>
-      </p:sp>
-      <p:sp>
-        <p:nvSpPr>
-          <p:cNvPr id="3" name="Subtítulo 2">
-            <a:extLst>
-              <a:ext uri="{FF2B5EF4-FFF2-40B4-BE49-F238E27FC236}">
-                <a16:creationId xmlns:a16="http://schemas.microsoft.com/office/drawing/2014/main" id="{66D63983-3846-BA1E-8519-E105026E6D0D}"/>
-              </a:ext>
-            </a:extLst>
-          </p:cNvPr>
-          <p:cNvSpPr>
-            <a:spLocks noGrp="1"/>
-          </p:cNvSpPr>
-          <p:nvPr>
-            <p:ph type="subTitle" idx="1"/>
-          </p:nvPr>
-        </p:nvSpPr>
-        <p:spPr/>
-        <p:txBody>
-          <a:bodyPr/>
-          <a:lstStyle/>
-          <a:p>
-            <a:r>
-              <a:rPr lang="es-ES" dirty="0">
-                <a:solidFill>
-                  <a:schemeClr val="bg1"/>
-                </a:solidFill>
-                <a:latin typeface="Bodoni MT Black" panose="02070A03080606020203" pitchFamily="18" charset="0"/>
-              </a:rPr>
-              <a:t>Ideal para niños y no tan niños</a:t>
-            </a:r>
-          </a:p>
-        </p:txBody>
-      </p:sp>
-    </p:spTree>
-    <p:extLst>
-      <p:ext uri="{BB962C8B-B14F-4D97-AF65-F5344CB8AC3E}">
-        <p14:creationId xmlns:p14="http://schemas.microsoft.com/office/powerpoint/2010/main" val="3358129538"/>
-      </p:ext>
-    </p:extLst>
-  </p:cSld>
-  <p:clrMapOvr>
-    <a:masterClrMapping/>
-  </p:clrMapOvr>
-</p:sld>
-</file>
-
-<file path=ppt/slides/slide2.xml><?xml version="1.0" encoding="utf-8"?>
-<p:sld xmlns:a="http://schemas.openxmlformats.org/drawingml/2006/main" xmlns:r="http://schemas.openxmlformats.org/officeDocument/2006/relationships" xmlns:p="http://schemas.openxmlformats.org/presentationml/2006/main">
-  <p:cSld>
-    <p:bg>
-      <p:bgPr>
-        <a:blipFill>
-          <a:blip r:embed="rId2"/>
-          <a:tile tx="0" ty="0" sx="100000" sy="100000" flip="none" algn="tl"/>
-        </a:blipFill>
-        <a:effectLst/>
-      </p:bgPr>
-    </p:bg>
-    <p:spTree>
-      <p:nvGrpSpPr>
-        <p:cNvPr id="1" name=""/>
-        <p:cNvGrpSpPr/>
-        <p:nvPr/>
-      </p:nvGrpSpPr>
-      <p:grpSpPr>
-        <a:xfrm>
-          <a:off x="0" y="0"/>
-          <a:ext cx="0" cy="0"/>
-          <a:chOff x="0" y="0"/>
-          <a:chExt cx="0" cy="0"/>
-        </a:xfrm>
-      </p:grpSpPr>
       <p:pic>
         <p:nvPicPr>
           <p:cNvPr id="5" name="Marcador de contenido 4">
@@ -3579,6 +3518,260 @@
   <p:clrMapOvr>
     <a:masterClrMapping/>
   </p:clrMapOvr>
+  <p:transition spd="slow">
+    <p:push dir="u"/>
+  </p:transition>
+  <p:timing>
+    <p:tnLst>
+      <p:par>
+        <p:cTn id="1" dur="indefinite" restart="never" nodeType="tmRoot">
+          <p:childTnLst>
+            <p:seq concurrent="1" nextAc="seek">
+              <p:cTn id="2" dur="indefinite" nodeType="mainSeq">
+                <p:childTnLst>
+                  <p:par>
+                    <p:cTn id="3" fill="hold">
+                      <p:stCondLst>
+                        <p:cond delay="indefinite"/>
+                      </p:stCondLst>
+                      <p:childTnLst>
+                        <p:par>
+                          <p:cTn id="4" fill="hold">
+                            <p:stCondLst>
+                              <p:cond delay="0"/>
+                            </p:stCondLst>
+                            <p:childTnLst>
+                              <p:par>
+                                <p:cTn id="5" presetID="31" presetClass="entr" presetSubtype="0" fill="hold" nodeType="clickEffect">
+                                  <p:stCondLst>
+                                    <p:cond delay="0"/>
+                                  </p:stCondLst>
+                                  <p:childTnLst>
+                                    <p:set>
+                                      <p:cBhvr>
+                                        <p:cTn id="6" dur="1" fill="hold">
+                                          <p:stCondLst>
+                                            <p:cond delay="0"/>
+                                          </p:stCondLst>
+                                        </p:cTn>
+                                        <p:tgtEl>
+                                          <p:spTgt spid="5"/>
+                                        </p:tgtEl>
+                                        <p:attrNameLst>
+                                          <p:attrName>style.visibility</p:attrName>
+                                        </p:attrNameLst>
+                                      </p:cBhvr>
+                                      <p:to>
+                                        <p:strVal val="visible"/>
+                                      </p:to>
+                                    </p:set>
+                                    <p:anim calcmode="lin" valueType="num">
+                                      <p:cBhvr>
+                                        <p:cTn id="7" dur="1000" fill="hold"/>
+                                        <p:tgtEl>
+                                          <p:spTgt spid="5"/>
+                                        </p:tgtEl>
+                                        <p:attrNameLst>
+                                          <p:attrName>ppt_w</p:attrName>
+                                        </p:attrNameLst>
+                                      </p:cBhvr>
+                                      <p:tavLst>
+                                        <p:tav tm="0">
+                                          <p:val>
+                                            <p:fltVal val="0"/>
+                                          </p:val>
+                                        </p:tav>
+                                        <p:tav tm="100000">
+                                          <p:val>
+                                            <p:strVal val="#ppt_w"/>
+                                          </p:val>
+                                        </p:tav>
+                                      </p:tavLst>
+                                    </p:anim>
+                                    <p:anim calcmode="lin" valueType="num">
+                                      <p:cBhvr>
+                                        <p:cTn id="8" dur="1000" fill="hold"/>
+                                        <p:tgtEl>
+                                          <p:spTgt spid="5"/>
+                                        </p:tgtEl>
+                                        <p:attrNameLst>
+                                          <p:attrName>ppt_h</p:attrName>
+                                        </p:attrNameLst>
+                                      </p:cBhvr>
+                                      <p:tavLst>
+                                        <p:tav tm="0">
+                                          <p:val>
+                                            <p:fltVal val="0"/>
+                                          </p:val>
+                                        </p:tav>
+                                        <p:tav tm="100000">
+                                          <p:val>
+                                            <p:strVal val="#ppt_h"/>
+                                          </p:val>
+                                        </p:tav>
+                                      </p:tavLst>
+                                    </p:anim>
+                                    <p:anim calcmode="lin" valueType="num">
+                                      <p:cBhvr>
+                                        <p:cTn id="9" dur="1000" fill="hold"/>
+                                        <p:tgtEl>
+                                          <p:spTgt spid="5"/>
+                                        </p:tgtEl>
+                                        <p:attrNameLst>
+                                          <p:attrName>style.rotation</p:attrName>
+                                        </p:attrNameLst>
+                                      </p:cBhvr>
+                                      <p:tavLst>
+                                        <p:tav tm="0">
+                                          <p:val>
+                                            <p:fltVal val="90"/>
+                                          </p:val>
+                                        </p:tav>
+                                        <p:tav tm="100000">
+                                          <p:val>
+                                            <p:fltVal val="0"/>
+                                          </p:val>
+                                        </p:tav>
+                                      </p:tavLst>
+                                    </p:anim>
+                                    <p:animEffect transition="in" filter="fade">
+                                      <p:cBhvr>
+                                        <p:cTn id="10" dur="1000"/>
+                                        <p:tgtEl>
+                                          <p:spTgt spid="5"/>
+                                        </p:tgtEl>
+                                      </p:cBhvr>
+                                    </p:animEffect>
+                                  </p:childTnLst>
+                                </p:cTn>
+                              </p:par>
+                            </p:childTnLst>
+                          </p:cTn>
+                        </p:par>
+                      </p:childTnLst>
+                    </p:cTn>
+                  </p:par>
+                  <p:par>
+                    <p:cTn id="11" fill="hold">
+                      <p:stCondLst>
+                        <p:cond delay="indefinite"/>
+                      </p:stCondLst>
+                      <p:childTnLst>
+                        <p:par>
+                          <p:cTn id="12" fill="hold">
+                            <p:stCondLst>
+                              <p:cond delay="0"/>
+                            </p:stCondLst>
+                            <p:childTnLst>
+                              <p:par>
+                                <p:cTn id="13" presetID="45" presetClass="entr" presetSubtype="0" fill="hold" nodeType="clickEffect">
+                                  <p:stCondLst>
+                                    <p:cond delay="0"/>
+                                  </p:stCondLst>
+                                  <p:childTnLst>
+                                    <p:set>
+                                      <p:cBhvr>
+                                        <p:cTn id="14" dur="1" fill="hold">
+                                          <p:stCondLst>
+                                            <p:cond delay="0"/>
+                                          </p:stCondLst>
+                                        </p:cTn>
+                                        <p:tgtEl>
+                                          <p:spTgt spid="9"/>
+                                        </p:tgtEl>
+                                        <p:attrNameLst>
+                                          <p:attrName>style.visibility</p:attrName>
+                                        </p:attrNameLst>
+                                      </p:cBhvr>
+                                      <p:to>
+                                        <p:strVal val="visible"/>
+                                      </p:to>
+                                    </p:set>
+                                    <p:animEffect transition="in" filter="fade">
+                                      <p:cBhvr>
+                                        <p:cTn id="15" dur="2000"/>
+                                        <p:tgtEl>
+                                          <p:spTgt spid="9"/>
+                                        </p:tgtEl>
+                                      </p:cBhvr>
+                                    </p:animEffect>
+                                    <p:anim calcmode="lin" valueType="num">
+                                      <p:cBhvr>
+                                        <p:cTn id="16" dur="2000" fill="hold"/>
+                                        <p:tgtEl>
+                                          <p:spTgt spid="9"/>
+                                        </p:tgtEl>
+                                        <p:attrNameLst>
+                                          <p:attrName>ppt_w</p:attrName>
+                                        </p:attrNameLst>
+                                      </p:cBhvr>
+                                      <p:tavLst>
+                                        <p:tav tm="0" fmla="#ppt_w*sin(2.5*pi*$)">
+                                          <p:val>
+                                            <p:fltVal val="0"/>
+                                          </p:val>
+                                        </p:tav>
+                                        <p:tav tm="100000">
+                                          <p:val>
+                                            <p:fltVal val="1"/>
+                                          </p:val>
+                                        </p:tav>
+                                      </p:tavLst>
+                                    </p:anim>
+                                    <p:anim calcmode="lin" valueType="num">
+                                      <p:cBhvr>
+                                        <p:cTn id="17" dur="2000" fill="hold"/>
+                                        <p:tgtEl>
+                                          <p:spTgt spid="9"/>
+                                        </p:tgtEl>
+                                        <p:attrNameLst>
+                                          <p:attrName>ppt_h</p:attrName>
+                                        </p:attrNameLst>
+                                      </p:cBhvr>
+                                      <p:tavLst>
+                                        <p:tav tm="0">
+                                          <p:val>
+                                            <p:strVal val="#ppt_h"/>
+                                          </p:val>
+                                        </p:tav>
+                                        <p:tav tm="100000">
+                                          <p:val>
+                                            <p:strVal val="#ppt_h"/>
+                                          </p:val>
+                                        </p:tav>
+                                      </p:tavLst>
+                                    </p:anim>
+                                  </p:childTnLst>
+                                </p:cTn>
+                              </p:par>
+                            </p:childTnLst>
+                          </p:cTn>
+                        </p:par>
+                      </p:childTnLst>
+                    </p:cTn>
+                  </p:par>
+                </p:childTnLst>
+              </p:cTn>
+              <p:prevCondLst>
+                <p:cond evt="onPrev" delay="0">
+                  <p:tgtEl>
+                    <p:sldTgt/>
+                  </p:tgtEl>
+                </p:cond>
+              </p:prevCondLst>
+              <p:nextCondLst>
+                <p:cond evt="onNext" delay="0">
+                  <p:tgtEl>
+                    <p:sldTgt/>
+                  </p:tgtEl>
+                </p:cond>
+              </p:nextCondLst>
+            </p:seq>
+          </p:childTnLst>
+        </p:cTn>
+      </p:par>
+    </p:tnLst>
+  </p:timing>
 </p:sld>
 </file>
 
@@ -3632,7 +3825,7 @@
         <p:spPr>
           <a:xfrm>
             <a:off x="838200" y="365125"/>
-            <a:ext cx="6507480" cy="1325563"/>
+            <a:ext cx="7665720" cy="1325563"/>
           </a:xfrm>
           <a:solidFill>
             <a:schemeClr val="bg1"/>
@@ -3646,7 +3839,9 @@
           <a:lstStyle/>
           <a:p>
             <a:r>
-              <a:rPr lang="es-ES" dirty="0"/>
+              <a:rPr lang="es-ES" dirty="0">
+                <a:latin typeface="Bodoni MT Black" panose="02070A03080606020203" pitchFamily="18" charset="0"/>
+              </a:rPr>
               <a:t>¿Qué problema resuelve?</a:t>
             </a:r>
           </a:p>
@@ -3742,6 +3937,18 @@
   <p:clrMapOvr>
     <a:masterClrMapping/>
   </p:clrMapOvr>
+  <mc:AlternateContent xmlns:mc="http://schemas.openxmlformats.org/markup-compatibility/2006">
+    <mc:Choice xmlns:p14="http://schemas.microsoft.com/office/powerpoint/2010/main" Requires="p14">
+      <p:transition spd="slow" p14:dur="1500">
+        <p:split orient="vert"/>
+      </p:transition>
+    </mc:Choice>
+    <mc:Fallback>
+      <p:transition spd="slow">
+        <p:split orient="vert"/>
+      </p:transition>
+    </mc:Fallback>
+  </mc:AlternateContent>
 </p:sld>
 </file>
 
@@ -3750,15 +3957,12 @@
   <p:cSld>
     <p:bg>
       <p:bgPr>
-        <a:blipFill dpi="0" rotWithShape="1">
-          <a:blip r:embed="rId2">
-            <a:lum/>
-          </a:blip>
-          <a:srcRect/>
-          <a:stretch>
-            <a:fillRect t="-9000" b="-9000"/>
-          </a:stretch>
-        </a:blipFill>
+        <a:solidFill>
+          <a:schemeClr val="tx1">
+            <a:lumMod val="85000"/>
+            <a:lumOff val="15000"/>
+          </a:schemeClr>
+        </a:solidFill>
         <a:effectLst/>
       </p:bgPr>
     </p:bg>
@@ -3806,22 +4010,32 @@
           <a:lstStyle/>
           <a:p>
             <a:r>
-              <a:rPr lang="es-ES" dirty="0"/>
+              <a:rPr lang="es-ES" dirty="0">
+                <a:latin typeface="Bodoni MT Black" panose="02070A03080606020203" pitchFamily="18" charset="0"/>
+              </a:rPr>
               <a:t>Nuestra solución: </a:t>
             </a:r>
             <a:r>
-              <a:rPr lang="es-ES" dirty="0" err="1"/>
+              <a:rPr lang="es-ES" dirty="0" err="1">
+                <a:latin typeface="Bodoni MT Black" panose="02070A03080606020203" pitchFamily="18" charset="0"/>
+              </a:rPr>
               <a:t>Fun</a:t>
             </a:r>
             <a:r>
-              <a:rPr lang="es-ES" dirty="0"/>
+              <a:rPr lang="es-ES" dirty="0">
+                <a:latin typeface="Bodoni MT Black" panose="02070A03080606020203" pitchFamily="18" charset="0"/>
+              </a:rPr>
               <a:t>-O-</a:t>
             </a:r>
             <a:r>
-              <a:rPr lang="es-ES" dirty="0" err="1"/>
+              <a:rPr lang="es-ES" dirty="0" err="1">
+                <a:latin typeface="Bodoni MT Black" panose="02070A03080606020203" pitchFamily="18" charset="0"/>
+              </a:rPr>
               <a:t>Matic</a:t>
             </a:r>
-            <a:endParaRPr lang="es-ES" dirty="0"/>
+            <a:endParaRPr lang="es-ES" dirty="0">
+              <a:latin typeface="Bodoni MT Black" panose="02070A03080606020203" pitchFamily="18" charset="0"/>
+            </a:endParaRPr>
           </a:p>
         </p:txBody>
       </p:sp>
@@ -3919,6 +4133,18 @@
   <p:clrMapOvr>
     <a:masterClrMapping/>
   </p:clrMapOvr>
+  <mc:AlternateContent xmlns:mc="http://schemas.openxmlformats.org/markup-compatibility/2006">
+    <mc:Choice xmlns:p14="http://schemas.microsoft.com/office/powerpoint/2010/main" Requires="p14">
+      <p:transition spd="slow" p14:dur="3400">
+        <p14:reveal/>
+      </p:transition>
+    </mc:Choice>
+    <mc:Fallback>
+      <p:transition spd="slow">
+        <p:fade/>
+      </p:transition>
+    </mc:Fallback>
+  </mc:AlternateContent>
 </p:sld>
 </file>
 
@@ -3972,7 +4198,7 @@
         <p:spPr>
           <a:xfrm>
             <a:off x="838200" y="365125"/>
-            <a:ext cx="5257800" cy="1325563"/>
+            <a:ext cx="6690360" cy="1325563"/>
           </a:xfrm>
           <a:solidFill>
             <a:schemeClr val="bg1"/>
@@ -3983,7 +4209,9 @@
           <a:lstStyle/>
           <a:p>
             <a:r>
-              <a:rPr lang="es-ES" dirty="0"/>
+              <a:rPr lang="es-ES" dirty="0">
+                <a:latin typeface="Bodoni MT Black" panose="02070A03080606020203" pitchFamily="18" charset="0"/>
+              </a:rPr>
               <a:t>Funciones principales</a:t>
             </a:r>
           </a:p>
@@ -4067,6 +4295,18 @@
   <p:clrMapOvr>
     <a:masterClrMapping/>
   </p:clrMapOvr>
+  <mc:AlternateContent xmlns:mc="http://schemas.openxmlformats.org/markup-compatibility/2006">
+    <mc:Choice xmlns:p14="http://schemas.microsoft.com/office/powerpoint/2010/main" Requires="p14">
+      <p:transition spd="slow" p14:dur="800">
+        <p:circle/>
+      </p:transition>
+    </mc:Choice>
+    <mc:Fallback>
+      <p:transition spd="slow">
+        <p:circle/>
+      </p:transition>
+    </mc:Fallback>
+  </mc:AlternateContent>
 </p:sld>
 </file>
 
@@ -4111,13 +4351,23 @@
             <p:ph type="title"/>
           </p:nvPr>
         </p:nvSpPr>
-        <p:spPr/>
-        <p:txBody>
-          <a:bodyPr/>
-          <a:lstStyle/>
-          <a:p>
-            <a:r>
-              <a:rPr lang="es-ES" dirty="0"/>
+        <p:spPr>
+          <a:xfrm>
+            <a:off x="838200" y="365125"/>
+            <a:ext cx="8072120" cy="1325563"/>
+          </a:xfrm>
+          <a:solidFill>
+            <a:schemeClr val="bg1"/>
+          </a:solidFill>
+        </p:spPr>
+        <p:txBody>
+          <a:bodyPr/>
+          <a:lstStyle/>
+          <a:p>
+            <a:r>
+              <a:rPr lang="es-ES" dirty="0">
+                <a:latin typeface="Bodoni MT Black" panose="02070A03080606020203" pitchFamily="18" charset="0"/>
+              </a:rPr>
               <a:t>Preparada para producción</a:t>
             </a:r>
           </a:p>
@@ -4139,7 +4389,15 @@
             <p:ph idx="1"/>
           </p:nvPr>
         </p:nvSpPr>
-        <p:spPr/>
+        <p:spPr>
+          <a:xfrm>
+            <a:off x="838200" y="1825625"/>
+            <a:ext cx="10515600" cy="1603375"/>
+          </a:xfrm>
+          <a:solidFill>
+            <a:schemeClr val="bg1"/>
+          </a:solidFill>
+        </p:spPr>
         <p:txBody>
           <a:bodyPr/>
           <a:lstStyle/>
@@ -4207,7 +4465,7 @@
         </p:blipFill>
         <p:spPr>
           <a:xfrm>
-            <a:off x="2184175" y="3429000"/>
+            <a:off x="2031775" y="3621881"/>
             <a:ext cx="3149826" cy="3149826"/>
           </a:xfrm>
           <a:prstGeom prst="rect">
@@ -4243,7 +4501,7 @@
         </p:blipFill>
         <p:spPr>
           <a:xfrm>
-            <a:off x="6001359" y="3429000"/>
+            <a:off x="6529679" y="3621881"/>
             <a:ext cx="2764063" cy="2764063"/>
           </a:xfrm>
           <a:prstGeom prst="rect">
@@ -4261,6 +4519,9 @@
   <p:clrMapOvr>
     <a:masterClrMapping/>
   </p:clrMapOvr>
+  <p:transition spd="slow">
+    <p:push dir="u"/>
+  </p:transition>
 </p:sld>
 </file>
 
@@ -4314,7 +4575,7 @@
         <p:spPr>
           <a:xfrm>
             <a:off x="838200" y="365125"/>
-            <a:ext cx="4333240" cy="1325563"/>
+            <a:ext cx="5369560" cy="1325563"/>
           </a:xfrm>
           <a:solidFill>
             <a:schemeClr val="bg1"/>
@@ -4325,7 +4586,9 @@
           <a:lstStyle/>
           <a:p>
             <a:r>
-              <a:rPr lang="es-ES" dirty="0"/>
+              <a:rPr lang="es-ES" dirty="0">
+                <a:latin typeface="Bodoni MT Black" panose="02070A03080606020203" pitchFamily="18" charset="0"/>
+              </a:rPr>
               <a:t>Gestión de datos</a:t>
             </a:r>
           </a:p>
@@ -4397,6 +4660,9 @@
   <p:clrMapOvr>
     <a:masterClrMapping/>
   </p:clrMapOvr>
+  <p:transition spd="slow">
+    <p:wipe/>
+  </p:transition>
 </p:sld>
 </file>
 
@@ -4446,13 +4712,23 @@
             <p:ph type="title"/>
           </p:nvPr>
         </p:nvSpPr>
-        <p:spPr/>
-        <p:txBody>
-          <a:bodyPr/>
-          <a:lstStyle/>
-          <a:p>
-            <a:r>
-              <a:rPr lang="es-ES" dirty="0"/>
+        <p:spPr>
+          <a:xfrm>
+            <a:off x="838200" y="365125"/>
+            <a:ext cx="6060440" cy="1325563"/>
+          </a:xfrm>
+          <a:solidFill>
+            <a:schemeClr val="bg1"/>
+          </a:solidFill>
+        </p:spPr>
+        <p:txBody>
+          <a:bodyPr/>
+          <a:lstStyle/>
+          <a:p>
+            <a:r>
+              <a:rPr lang="es-ES" dirty="0">
+                <a:latin typeface="Bodoni MT Black" panose="02070A03080606020203" pitchFamily="18" charset="0"/>
+              </a:rPr>
               <a:t>Futuro del proyecto</a:t>
             </a:r>
           </a:p>
@@ -4474,7 +4750,15 @@
             <p:ph idx="1"/>
           </p:nvPr>
         </p:nvSpPr>
-        <p:spPr/>
+        <p:spPr>
+          <a:xfrm>
+            <a:off x="838200" y="1825625"/>
+            <a:ext cx="8143240" cy="1679575"/>
+          </a:xfrm>
+          <a:solidFill>
+            <a:schemeClr val="bg1"/>
+          </a:solidFill>
+        </p:spPr>
         <p:txBody>
           <a:bodyPr/>
           <a:lstStyle/>
@@ -4508,6 +4792,180 @@
   <p:clrMapOvr>
     <a:masterClrMapping/>
   </p:clrMapOvr>
+  <p:transition spd="slow">
+    <p:randomBar dir="vert"/>
+  </p:transition>
+</p:sld>
+</file>
+
+<file path=ppt/slides/slide9.xml><?xml version="1.0" encoding="utf-8"?>
+<p:sld xmlns:a="http://schemas.openxmlformats.org/drawingml/2006/main" xmlns:r="http://schemas.openxmlformats.org/officeDocument/2006/relationships" xmlns:p="http://schemas.openxmlformats.org/presentationml/2006/main">
+  <p:cSld>
+    <p:bg>
+      <p:bgPr>
+        <a:blipFill dpi="0" rotWithShape="1">
+          <a:blip r:embed="rId2">
+            <a:lum/>
+          </a:blip>
+          <a:srcRect/>
+          <a:stretch>
+            <a:fillRect l="-16000" r="-16000"/>
+          </a:stretch>
+        </a:blipFill>
+        <a:effectLst/>
+      </p:bgPr>
+    </p:bg>
+    <p:spTree>
+      <p:nvGrpSpPr>
+        <p:cNvPr id="1" name=""/>
+        <p:cNvGrpSpPr/>
+        <p:nvPr/>
+      </p:nvGrpSpPr>
+      <p:grpSpPr>
+        <a:xfrm>
+          <a:off x="0" y="0"/>
+          <a:ext cx="0" cy="0"/>
+          <a:chOff x="0" y="0"/>
+          <a:chExt cx="0" cy="0"/>
+        </a:xfrm>
+      </p:grpSpPr>
+      <p:sp>
+        <p:nvSpPr>
+          <p:cNvPr id="2" name="Título 1">
+            <a:extLst>
+              <a:ext uri="{FF2B5EF4-FFF2-40B4-BE49-F238E27FC236}">
+                <a16:creationId xmlns:a16="http://schemas.microsoft.com/office/drawing/2014/main" id="{AD7ED5F9-4E7A-0207-A6C0-07A3CAAE62DC}"/>
+              </a:ext>
+            </a:extLst>
+          </p:cNvPr>
+          <p:cNvSpPr>
+            <a:spLocks noGrp="1"/>
+          </p:cNvSpPr>
+          <p:nvPr>
+            <p:ph type="title"/>
+          </p:nvPr>
+        </p:nvSpPr>
+        <p:spPr>
+          <a:xfrm>
+            <a:off x="838200" y="365125"/>
+            <a:ext cx="7249160" cy="1325563"/>
+          </a:xfrm>
+          <a:solidFill>
+            <a:schemeClr val="bg1"/>
+          </a:solidFill>
+        </p:spPr>
+        <p:txBody>
+          <a:bodyPr/>
+          <a:lstStyle/>
+          <a:p>
+            <a:r>
+              <a:rPr lang="es-ES" dirty="0">
+                <a:latin typeface="Bodoni MT Black" panose="02070A03080606020203" pitchFamily="18" charset="0"/>
+              </a:rPr>
+              <a:t>¡Gracias por atenderme!</a:t>
+            </a:r>
+          </a:p>
+        </p:txBody>
+      </p:sp>
+      <p:sp>
+        <p:nvSpPr>
+          <p:cNvPr id="3" name="Marcador de contenido 2">
+            <a:extLst>
+              <a:ext uri="{FF2B5EF4-FFF2-40B4-BE49-F238E27FC236}">
+                <a16:creationId xmlns:a16="http://schemas.microsoft.com/office/drawing/2014/main" id="{E1B31D1B-7AAB-152D-EAFC-FDC02F05B0F9}"/>
+              </a:ext>
+            </a:extLst>
+          </p:cNvPr>
+          <p:cNvSpPr>
+            <a:spLocks noGrp="1"/>
+          </p:cNvSpPr>
+          <p:nvPr>
+            <p:ph idx="1"/>
+          </p:nvPr>
+        </p:nvSpPr>
+        <p:spPr>
+          <a:xfrm>
+            <a:off x="838200" y="1825625"/>
+            <a:ext cx="10515600" cy="3335655"/>
+          </a:xfrm>
+          <a:solidFill>
+            <a:schemeClr val="bg1"/>
+          </a:solidFill>
+        </p:spPr>
+        <p:txBody>
+          <a:bodyPr/>
+          <a:lstStyle/>
+          <a:p>
+            <a:pPr>
+              <a:spcBef>
+                <a:spcPts val="0"/>
+              </a:spcBef>
+            </a:pPr>
+            <a:endParaRPr lang="es-ES" dirty="0"/>
+          </a:p>
+          <a:p>
+            <a:pPr>
+              <a:spcBef>
+                <a:spcPts val="0"/>
+              </a:spcBef>
+            </a:pPr>
+            <a:r>
+              <a:rPr lang="es-ES" dirty="0"/>
+              <a:t>Contáctame : </a:t>
+            </a:r>
+          </a:p>
+          <a:p>
+            <a:pPr marL="0" indent="263525">
+              <a:spcBef>
+                <a:spcPts val="0"/>
+              </a:spcBef>
+              <a:buNone/>
+            </a:pPr>
+            <a:r>
+              <a:rPr lang="es-ES" dirty="0">
+                <a:hlinkClick r:id="rId3"/>
+              </a:rPr>
+              <a:t>https://www.linkedin.com/in/mercedes-cuesta/</a:t>
+            </a:r>
+            <a:endParaRPr lang="es-ES" dirty="0"/>
+          </a:p>
+          <a:p>
+            <a:endParaRPr lang="es-ES" dirty="0"/>
+          </a:p>
+          <a:p>
+            <a:r>
+              <a:rPr lang="es-ES" dirty="0"/>
+              <a:t>Prueba la aplicación : </a:t>
+            </a:r>
+            <a:r>
+              <a:rPr lang="es-ES" dirty="0">
+                <a:hlinkClick r:id="rId4"/>
+              </a:rPr>
+              <a:t>https://github.com/Merchecuesta/Portfolio/tree/main/Funomatic</a:t>
+            </a:r>
+            <a:r>
+              <a:rPr lang="es-ES" dirty="0"/>
+              <a:t> </a:t>
+            </a:r>
+          </a:p>
+          <a:p>
+            <a:endParaRPr lang="es-ES" dirty="0"/>
+          </a:p>
+        </p:txBody>
+      </p:sp>
+    </p:spTree>
+    <p:extLst>
+      <p:ext uri="{BB962C8B-B14F-4D97-AF65-F5344CB8AC3E}">
+        <p14:creationId xmlns:p14="http://schemas.microsoft.com/office/powerpoint/2010/main" val="3204572622"/>
+      </p:ext>
+    </p:extLst>
+  </p:cSld>
+  <p:clrMapOvr>
+    <a:masterClrMapping/>
+  </p:clrMapOvr>
+  <p:transition spd="med">
+    <p:pull/>
+  </p:transition>
 </p:sld>
 </file>
 

--- a/Funomatic/doc/Presentaciónapp.pptx
+++ b/Funomatic/doc/Presentaciónapp.pptx
@@ -267,7 +267,7 @@
           <a:p>
             <a:fld id="{DD112C9A-6099-41F4-BB38-5C449D2AC208}" type="datetimeFigureOut">
               <a:rPr lang="es-ES" smtClean="0"/>
-              <a:t>15/09/2025</a:t>
+              <a:t>16/09/2025</a:t>
             </a:fld>
             <a:endParaRPr lang="es-ES"/>
           </a:p>
@@ -465,7 +465,7 @@
           <a:p>
             <a:fld id="{DD112C9A-6099-41F4-BB38-5C449D2AC208}" type="datetimeFigureOut">
               <a:rPr lang="es-ES" smtClean="0"/>
-              <a:t>15/09/2025</a:t>
+              <a:t>16/09/2025</a:t>
             </a:fld>
             <a:endParaRPr lang="es-ES"/>
           </a:p>
@@ -673,7 +673,7 @@
           <a:p>
             <a:fld id="{DD112C9A-6099-41F4-BB38-5C449D2AC208}" type="datetimeFigureOut">
               <a:rPr lang="es-ES" smtClean="0"/>
-              <a:t>15/09/2025</a:t>
+              <a:t>16/09/2025</a:t>
             </a:fld>
             <a:endParaRPr lang="es-ES"/>
           </a:p>
@@ -871,7 +871,7 @@
           <a:p>
             <a:fld id="{DD112C9A-6099-41F4-BB38-5C449D2AC208}" type="datetimeFigureOut">
               <a:rPr lang="es-ES" smtClean="0"/>
-              <a:t>15/09/2025</a:t>
+              <a:t>16/09/2025</a:t>
             </a:fld>
             <a:endParaRPr lang="es-ES"/>
           </a:p>
@@ -1146,7 +1146,7 @@
           <a:p>
             <a:fld id="{DD112C9A-6099-41F4-BB38-5C449D2AC208}" type="datetimeFigureOut">
               <a:rPr lang="es-ES" smtClean="0"/>
-              <a:t>15/09/2025</a:t>
+              <a:t>16/09/2025</a:t>
             </a:fld>
             <a:endParaRPr lang="es-ES"/>
           </a:p>
@@ -1411,7 +1411,7 @@
           <a:p>
             <a:fld id="{DD112C9A-6099-41F4-BB38-5C449D2AC208}" type="datetimeFigureOut">
               <a:rPr lang="es-ES" smtClean="0"/>
-              <a:t>15/09/2025</a:t>
+              <a:t>16/09/2025</a:t>
             </a:fld>
             <a:endParaRPr lang="es-ES"/>
           </a:p>
@@ -1823,7 +1823,7 @@
           <a:p>
             <a:fld id="{DD112C9A-6099-41F4-BB38-5C449D2AC208}" type="datetimeFigureOut">
               <a:rPr lang="es-ES" smtClean="0"/>
-              <a:t>15/09/2025</a:t>
+              <a:t>16/09/2025</a:t>
             </a:fld>
             <a:endParaRPr lang="es-ES"/>
           </a:p>
@@ -1964,7 +1964,7 @@
           <a:p>
             <a:fld id="{DD112C9A-6099-41F4-BB38-5C449D2AC208}" type="datetimeFigureOut">
               <a:rPr lang="es-ES" smtClean="0"/>
-              <a:t>15/09/2025</a:t>
+              <a:t>16/09/2025</a:t>
             </a:fld>
             <a:endParaRPr lang="es-ES"/>
           </a:p>
@@ -2077,7 +2077,7 @@
           <a:p>
             <a:fld id="{DD112C9A-6099-41F4-BB38-5C449D2AC208}" type="datetimeFigureOut">
               <a:rPr lang="es-ES" smtClean="0"/>
-              <a:t>15/09/2025</a:t>
+              <a:t>16/09/2025</a:t>
             </a:fld>
             <a:endParaRPr lang="es-ES"/>
           </a:p>
@@ -2388,7 +2388,7 @@
           <a:p>
             <a:fld id="{DD112C9A-6099-41F4-BB38-5C449D2AC208}" type="datetimeFigureOut">
               <a:rPr lang="es-ES" smtClean="0"/>
-              <a:t>15/09/2025</a:t>
+              <a:t>16/09/2025</a:t>
             </a:fld>
             <a:endParaRPr lang="es-ES"/>
           </a:p>
@@ -2676,7 +2676,7 @@
           <a:p>
             <a:fld id="{DD112C9A-6099-41F4-BB38-5C449D2AC208}" type="datetimeFigureOut">
               <a:rPr lang="es-ES" smtClean="0"/>
-              <a:t>15/09/2025</a:t>
+              <a:t>16/09/2025</a:t>
             </a:fld>
             <a:endParaRPr lang="es-ES"/>
           </a:p>
@@ -2917,7 +2917,7 @@
           <a:p>
             <a:fld id="{DD112C9A-6099-41F4-BB38-5C449D2AC208}" type="datetimeFigureOut">
               <a:rPr lang="es-ES" smtClean="0"/>
-              <a:t>15/09/2025</a:t>
+              <a:t>16/09/2025</a:t>
             </a:fld>
             <a:endParaRPr lang="es-ES"/>
           </a:p>
@@ -3344,10 +3344,10 @@
       </p:grpSpPr>
       <p:pic>
         <p:nvPicPr>
-          <p:cNvPr id="11" name="Imagen 10">
-            <a:extLst>
-              <a:ext uri="{FF2B5EF4-FFF2-40B4-BE49-F238E27FC236}">
-                <a16:creationId xmlns:a16="http://schemas.microsoft.com/office/drawing/2014/main" id="{90987D80-0F2A-8339-15E8-74DD659467EC}"/>
+          <p:cNvPr id="3" name="Imagen 2">
+            <a:extLst>
+              <a:ext uri="{FF2B5EF4-FFF2-40B4-BE49-F238E27FC236}">
+                <a16:creationId xmlns:a16="http://schemas.microsoft.com/office/drawing/2014/main" id="{350837F3-514C-B8C3-2A5E-F320D7EC2BA4}"/>
               </a:ext>
             </a:extLst>
           </p:cNvPr>
@@ -3370,15 +3370,12 @@
         </p:blipFill>
         <p:spPr>
           <a:xfrm>
-            <a:off x="2057400" y="341299"/>
-            <a:ext cx="8077200" cy="6024578"/>
+            <a:off x="1574800" y="145836"/>
+            <a:ext cx="8803527" cy="6566327"/>
           </a:xfrm>
           <a:prstGeom prst="rect">
             <a:avLst/>
           </a:prstGeom>
-          <a:solidFill>
-            <a:srgbClr val="7030A0"/>
-          </a:solidFill>
         </p:spPr>
       </p:pic>
     </p:spTree>
@@ -3391,13 +3388,13 @@
   <p:clrMapOvr>
     <a:masterClrMapping/>
   </p:clrMapOvr>
-  <mc:AlternateContent xmlns:mc="http://schemas.openxmlformats.org/markup-compatibility/2006">
-    <mc:Choice xmlns:p159="http://schemas.microsoft.com/office/powerpoint/2015/09/main" Requires="p159">
+  <mc:AlternateContent xmlns:mc="http://schemas.openxmlformats.org/markup-compatibility/2006" xmlns:p159="http://schemas.microsoft.com/office/powerpoint/2015/09/main">
+    <mc:Choice Requires="p159">
       <p:transition xmlns:p14="http://schemas.microsoft.com/office/powerpoint/2010/main" spd="slow" p14:dur="2000">
         <p159:morph option="byObject"/>
       </p:transition>
     </mc:Choice>
-    <mc:Fallback>
+    <mc:Fallback xmlns="">
       <p:transition spd="slow">
         <p:fade/>
       </p:transition>
@@ -3937,13 +3934,13 @@
   <p:clrMapOvr>
     <a:masterClrMapping/>
   </p:clrMapOvr>
-  <mc:AlternateContent xmlns:mc="http://schemas.openxmlformats.org/markup-compatibility/2006">
-    <mc:Choice xmlns:p14="http://schemas.microsoft.com/office/powerpoint/2010/main" Requires="p14">
+  <mc:AlternateContent xmlns:mc="http://schemas.openxmlformats.org/markup-compatibility/2006" xmlns:p14="http://schemas.microsoft.com/office/powerpoint/2010/main">
+    <mc:Choice Requires="p14">
       <p:transition spd="slow" p14:dur="1500">
         <p:split orient="vert"/>
       </p:transition>
     </mc:Choice>
-    <mc:Fallback>
+    <mc:Fallback xmlns="">
       <p:transition spd="slow">
         <p:split orient="vert"/>
       </p:transition>
@@ -4133,13 +4130,13 @@
   <p:clrMapOvr>
     <a:masterClrMapping/>
   </p:clrMapOvr>
-  <mc:AlternateContent xmlns:mc="http://schemas.openxmlformats.org/markup-compatibility/2006">
-    <mc:Choice xmlns:p14="http://schemas.microsoft.com/office/powerpoint/2010/main" Requires="p14">
+  <mc:AlternateContent xmlns:mc="http://schemas.openxmlformats.org/markup-compatibility/2006" xmlns:p14="http://schemas.microsoft.com/office/powerpoint/2010/main">
+    <mc:Choice Requires="p14">
       <p:transition spd="slow" p14:dur="3400">
         <p14:reveal/>
       </p:transition>
     </mc:Choice>
-    <mc:Fallback>
+    <mc:Fallback xmlns="">
       <p:transition spd="slow">
         <p:fade/>
       </p:transition>
@@ -4295,13 +4292,13 @@
   <p:clrMapOvr>
     <a:masterClrMapping/>
   </p:clrMapOvr>
-  <mc:AlternateContent xmlns:mc="http://schemas.openxmlformats.org/markup-compatibility/2006">
-    <mc:Choice xmlns:p14="http://schemas.microsoft.com/office/powerpoint/2010/main" Requires="p14">
+  <mc:AlternateContent xmlns:mc="http://schemas.openxmlformats.org/markup-compatibility/2006" xmlns:p14="http://schemas.microsoft.com/office/powerpoint/2010/main">
+    <mc:Choice Requires="p14">
       <p:transition spd="slow" p14:dur="800">
         <p:circle/>
       </p:transition>
     </mc:Choice>
-    <mc:Fallback>
+    <mc:Fallback xmlns="">
       <p:transition spd="slow">
         <p:circle/>
       </p:transition>
